--- a/Presentation.pptx
+++ b/Presentation.pptx
@@ -107,6 +107,51 @@
 </p:presentation>
 </file>
 
+<file path=ppt/revisionInfo.xml><?xml version="1.0" encoding="utf-8"?>
+<p1510:revInfo xmlns:a="http://schemas.openxmlformats.org/drawingml/2006/main" xmlns:r="http://schemas.openxmlformats.org/officeDocument/2006/relationships" xmlns:p1510="http://schemas.microsoft.com/office/powerpoint/2015/10/main">
+  <p1510:revLst>
+    <p1510:client id="{D040D512-EB9C-5B4C-A671-CE0141D6DBAD}" v="128" dt="2026-04-29T00:47:27.871"/>
+  </p1510:revLst>
+</p1510:revInfo>
+</file>
+
+<file path=ppt/changesInfos/changesInfo1.xml><?xml version="1.0" encoding="utf-8"?>
+<pc:chgInfo xmlns:a="http://schemas.openxmlformats.org/drawingml/2006/main" xmlns:r="http://schemas.openxmlformats.org/officeDocument/2006/relationships" xmlns:ac="http://schemas.microsoft.com/office/drawing/2013/main/command" xmlns:pc="http://schemas.microsoft.com/office/powerpoint/2013/main/command">
+  <pc:docChgLst>
+    <pc:chgData name="Edmonds, Levi, A. CDT (EDU)" userId="S::levi.a.edmonds@uscga.edu::726a4f9e-a7b6-4cd1-909c-56511f60f9b8" providerId="AD" clId="Web-{D040D512-EB9C-5B4C-A671-CE0141D6DBAD}"/>
+    <pc:docChg chg="modSld">
+      <pc:chgData name="Edmonds, Levi, A. CDT (EDU)" userId="S::levi.a.edmonds@uscga.edu::726a4f9e-a7b6-4cd1-909c-56511f60f9b8" providerId="AD" clId="Web-{D040D512-EB9C-5B4C-A671-CE0141D6DBAD}" dt="2026-04-29T00:47:27.871" v="61" actId="20577"/>
+      <pc:docMkLst>
+        <pc:docMk/>
+      </pc:docMkLst>
+      <pc:sldChg chg="modSp">
+        <pc:chgData name="Edmonds, Levi, A. CDT (EDU)" userId="S::levi.a.edmonds@uscga.edu::726a4f9e-a7b6-4cd1-909c-56511f60f9b8" providerId="AD" clId="Web-{D040D512-EB9C-5B4C-A671-CE0141D6DBAD}" dt="2026-04-29T00:47:27.871" v="61" actId="20577"/>
+        <pc:sldMkLst>
+          <pc:docMk/>
+          <pc:sldMk cId="2478767959" sldId="256"/>
+        </pc:sldMkLst>
+        <pc:spChg chg="mod">
+          <ac:chgData name="Edmonds, Levi, A. CDT (EDU)" userId="S::levi.a.edmonds@uscga.edu::726a4f9e-a7b6-4cd1-909c-56511f60f9b8" providerId="AD" clId="Web-{D040D512-EB9C-5B4C-A671-CE0141D6DBAD}" dt="2026-04-29T00:44:58.647" v="15" actId="20577"/>
+          <ac:spMkLst>
+            <pc:docMk/>
+            <pc:sldMk cId="2478767959" sldId="256"/>
+            <ac:spMk id="6" creationId="{2099CDA1-6C0A-DF3D-B069-09BE87F0C941}"/>
+          </ac:spMkLst>
+        </pc:spChg>
+        <pc:spChg chg="mod">
+          <ac:chgData name="Edmonds, Levi, A. CDT (EDU)" userId="S::levi.a.edmonds@uscga.edu::726a4f9e-a7b6-4cd1-909c-56511f60f9b8" providerId="AD" clId="Web-{D040D512-EB9C-5B4C-A671-CE0141D6DBAD}" dt="2026-04-29T00:47:27.871" v="61" actId="20577"/>
+          <ac:spMkLst>
+            <pc:docMk/>
+            <pc:sldMk cId="2478767959" sldId="256"/>
+            <ac:spMk id="7" creationId="{0E4BC430-9E0A-0933-82A8-DC431303C8DE}"/>
+          </ac:spMkLst>
+        </pc:spChg>
+      </pc:sldChg>
+    </pc:docChg>
+  </pc:docChgLst>
+</pc:chgInfo>
+</file>
+
 <file path=ppt/slideLayouts/slideLayout1.xml><?xml version="1.0" encoding="utf-8"?>
 <p:sldLayout xmlns:a="http://schemas.openxmlformats.org/drawingml/2006/main" xmlns:r="http://schemas.openxmlformats.org/officeDocument/2006/relationships" xmlns:p="http://schemas.openxmlformats.org/presentationml/2006/main" type="title" preserve="1">
   <p:cSld name="Title Slide">
@@ -152,7 +197,6 @@
               <a:rPr lang="en-US"/>
               <a:t>Click to edit Master title style</a:t>
             </a:r>
-            <a:endParaRPr lang="en-US" dirty="0"/>
           </a:p>
         </p:txBody>
       </p:sp>
@@ -217,7 +261,6 @@
               <a:rPr lang="en-US"/>
               <a:t>Click to edit Master subtitle style</a:t>
             </a:r>
-            <a:endParaRPr lang="en-US" dirty="0"/>
           </a:p>
         </p:txBody>
       </p:sp>
@@ -238,7 +281,7 @@
           <a:p>
             <a:fld id="{60749F31-73BE-46B5-90B6-A52AECA1012A}" type="datetimeFigureOut">
               <a:rPr lang="en-US" smtClean="0"/>
-              <a:t>4/27/2026</a:t>
+              <a:t>4/28/2026</a:t>
             </a:fld>
             <a:endParaRPr lang="en-US"/>
           </a:p>
@@ -335,7 +378,6 @@
               <a:rPr lang="en-US"/>
               <a:t>Click to edit Master title style</a:t>
             </a:r>
-            <a:endParaRPr lang="en-US" dirty="0"/>
           </a:p>
         </p:txBody>
       </p:sp>
@@ -387,7 +429,6 @@
               <a:rPr lang="en-US"/>
               <a:t>Fifth level</a:t>
             </a:r>
-            <a:endParaRPr lang="en-US" dirty="0"/>
           </a:p>
         </p:txBody>
       </p:sp>
@@ -408,7 +449,7 @@
           <a:p>
             <a:fld id="{60749F31-73BE-46B5-90B6-A52AECA1012A}" type="datetimeFigureOut">
               <a:rPr lang="en-US" smtClean="0"/>
-              <a:t>4/27/2026</a:t>
+              <a:t>4/28/2026</a:t>
             </a:fld>
             <a:endParaRPr lang="en-US"/>
           </a:p>
@@ -510,7 +551,6 @@
               <a:rPr lang="en-US"/>
               <a:t>Click to edit Master title style</a:t>
             </a:r>
-            <a:endParaRPr lang="en-US" dirty="0"/>
           </a:p>
         </p:txBody>
       </p:sp>
@@ -567,7 +607,6 @@
               <a:rPr lang="en-US"/>
               <a:t>Fifth level</a:t>
             </a:r>
-            <a:endParaRPr lang="en-US" dirty="0"/>
           </a:p>
         </p:txBody>
       </p:sp>
@@ -588,7 +627,7 @@
           <a:p>
             <a:fld id="{60749F31-73BE-46B5-90B6-A52AECA1012A}" type="datetimeFigureOut">
               <a:rPr lang="en-US" smtClean="0"/>
-              <a:t>4/27/2026</a:t>
+              <a:t>4/28/2026</a:t>
             </a:fld>
             <a:endParaRPr lang="en-US"/>
           </a:p>
@@ -685,7 +724,6 @@
               <a:rPr lang="en-US"/>
               <a:t>Click to edit Master title style</a:t>
             </a:r>
-            <a:endParaRPr lang="en-US" dirty="0"/>
           </a:p>
         </p:txBody>
       </p:sp>
@@ -737,7 +775,6 @@
               <a:rPr lang="en-US"/>
               <a:t>Fifth level</a:t>
             </a:r>
-            <a:endParaRPr lang="en-US" dirty="0"/>
           </a:p>
         </p:txBody>
       </p:sp>
@@ -758,7 +795,7 @@
           <a:p>
             <a:fld id="{60749F31-73BE-46B5-90B6-A52AECA1012A}" type="datetimeFigureOut">
               <a:rPr lang="en-US" smtClean="0"/>
-              <a:t>4/27/2026</a:t>
+              <a:t>4/28/2026</a:t>
             </a:fld>
             <a:endParaRPr lang="en-US"/>
           </a:p>
@@ -864,7 +901,6 @@
               <a:rPr lang="en-US"/>
               <a:t>Click to edit Master title style</a:t>
             </a:r>
-            <a:endParaRPr lang="en-US" dirty="0"/>
           </a:p>
         </p:txBody>
       </p:sp>
@@ -1004,7 +1040,7 @@
           <a:p>
             <a:fld id="{60749F31-73BE-46B5-90B6-A52AECA1012A}" type="datetimeFigureOut">
               <a:rPr lang="en-US" smtClean="0"/>
-              <a:t>4/27/2026</a:t>
+              <a:t>4/28/2026</a:t>
             </a:fld>
             <a:endParaRPr lang="en-US"/>
           </a:p>
@@ -1101,7 +1137,6 @@
               <a:rPr lang="en-US"/>
               <a:t>Click to edit Master title style</a:t>
             </a:r>
-            <a:endParaRPr lang="en-US" dirty="0"/>
           </a:p>
         </p:txBody>
       </p:sp>
@@ -1158,7 +1193,6 @@
               <a:rPr lang="en-US"/>
               <a:t>Fifth level</a:t>
             </a:r>
-            <a:endParaRPr lang="en-US" dirty="0"/>
           </a:p>
         </p:txBody>
       </p:sp>
@@ -1215,7 +1249,6 @@
               <a:rPr lang="en-US"/>
               <a:t>Fifth level</a:t>
             </a:r>
-            <a:endParaRPr lang="en-US" dirty="0"/>
           </a:p>
         </p:txBody>
       </p:sp>
@@ -1236,7 +1269,7 @@
           <a:p>
             <a:fld id="{60749F31-73BE-46B5-90B6-A52AECA1012A}" type="datetimeFigureOut">
               <a:rPr lang="en-US" smtClean="0"/>
-              <a:t>4/27/2026</a:t>
+              <a:t>4/28/2026</a:t>
             </a:fld>
             <a:endParaRPr lang="en-US"/>
           </a:p>
@@ -1338,7 +1371,6 @@
               <a:rPr lang="en-US"/>
               <a:t>Click to edit Master title style</a:t>
             </a:r>
-            <a:endParaRPr lang="en-US" dirty="0"/>
           </a:p>
         </p:txBody>
       </p:sp>
@@ -1460,7 +1492,6 @@
               <a:rPr lang="en-US"/>
               <a:t>Fifth level</a:t>
             </a:r>
-            <a:endParaRPr lang="en-US" dirty="0"/>
           </a:p>
         </p:txBody>
       </p:sp>
@@ -1582,7 +1613,6 @@
               <a:rPr lang="en-US"/>
               <a:t>Fifth level</a:t>
             </a:r>
-            <a:endParaRPr lang="en-US" dirty="0"/>
           </a:p>
         </p:txBody>
       </p:sp>
@@ -1603,7 +1633,7 @@
           <a:p>
             <a:fld id="{60749F31-73BE-46B5-90B6-A52AECA1012A}" type="datetimeFigureOut">
               <a:rPr lang="en-US" smtClean="0"/>
-              <a:t>4/27/2026</a:t>
+              <a:t>4/28/2026</a:t>
             </a:fld>
             <a:endParaRPr lang="en-US"/>
           </a:p>
@@ -1700,7 +1730,6 @@
               <a:rPr lang="en-US"/>
               <a:t>Click to edit Master title style</a:t>
             </a:r>
-            <a:endParaRPr lang="en-US" dirty="0"/>
           </a:p>
         </p:txBody>
       </p:sp>
@@ -1721,7 +1750,7 @@
           <a:p>
             <a:fld id="{60749F31-73BE-46B5-90B6-A52AECA1012A}" type="datetimeFigureOut">
               <a:rPr lang="en-US" smtClean="0"/>
-              <a:t>4/27/2026</a:t>
+              <a:t>4/28/2026</a:t>
             </a:fld>
             <a:endParaRPr lang="en-US"/>
           </a:p>
@@ -1816,7 +1845,7 @@
           <a:p>
             <a:fld id="{60749F31-73BE-46B5-90B6-A52AECA1012A}" type="datetimeFigureOut">
               <a:rPr lang="en-US" smtClean="0"/>
-              <a:t>4/27/2026</a:t>
+              <a:t>4/28/2026</a:t>
             </a:fld>
             <a:endParaRPr lang="en-US"/>
           </a:p>
@@ -1922,7 +1951,6 @@
               <a:rPr lang="en-US"/>
               <a:t>Click to edit Master title style</a:t>
             </a:r>
-            <a:endParaRPr lang="en-US" dirty="0"/>
           </a:p>
         </p:txBody>
       </p:sp>
@@ -2007,7 +2035,6 @@
               <a:rPr lang="en-US"/>
               <a:t>Fifth level</a:t>
             </a:r>
-            <a:endParaRPr lang="en-US" dirty="0"/>
           </a:p>
         </p:txBody>
       </p:sp>
@@ -2093,7 +2120,7 @@
           <a:p>
             <a:fld id="{60749F31-73BE-46B5-90B6-A52AECA1012A}" type="datetimeFigureOut">
               <a:rPr lang="en-US" smtClean="0"/>
-              <a:t>4/27/2026</a:t>
+              <a:t>4/28/2026</a:t>
             </a:fld>
             <a:endParaRPr lang="en-US"/>
           </a:p>
@@ -2199,7 +2226,6 @@
               <a:rPr lang="en-US"/>
               <a:t>Click to edit Master title style</a:t>
             </a:r>
-            <a:endParaRPr lang="en-US" dirty="0"/>
           </a:p>
         </p:txBody>
       </p:sp>
@@ -2264,7 +2290,6 @@
               <a:rPr lang="en-US"/>
               <a:t>Click icon to add picture</a:t>
             </a:r>
-            <a:endParaRPr lang="en-US" dirty="0"/>
           </a:p>
         </p:txBody>
       </p:sp>
@@ -2350,7 +2375,7 @@
           <a:p>
             <a:fld id="{60749F31-73BE-46B5-90B6-A52AECA1012A}" type="datetimeFigureOut">
               <a:rPr lang="en-US" smtClean="0"/>
-              <a:t>4/27/2026</a:t>
+              <a:t>4/28/2026</a:t>
             </a:fld>
             <a:endParaRPr lang="en-US"/>
           </a:p>
@@ -2462,7 +2487,6 @@
               <a:rPr lang="en-US"/>
               <a:t>Click to edit Master title style</a:t>
             </a:r>
-            <a:endParaRPr lang="en-US" dirty="0"/>
           </a:p>
         </p:txBody>
       </p:sp>
@@ -2524,7 +2548,6 @@
               <a:rPr lang="en-US"/>
               <a:t>Fifth level</a:t>
             </a:r>
-            <a:endParaRPr lang="en-US" dirty="0"/>
           </a:p>
         </p:txBody>
       </p:sp>
@@ -2563,7 +2586,7 @@
           <a:p>
             <a:fld id="{60749F31-73BE-46B5-90B6-A52AECA1012A}" type="datetimeFigureOut">
               <a:rPr lang="en-US" smtClean="0"/>
-              <a:t>4/27/2026</a:t>
+              <a:t>4/28/2026</a:t>
             </a:fld>
             <a:endParaRPr lang="en-US"/>
           </a:p>
@@ -2998,14 +3021,14 @@
           <a:p>
             <a:pPr algn="ctr"/>
             <a:r>
-              <a:rPr lang="en-US" dirty="0"/>
+              <a:rPr lang="en-US"/>
               <a:t>EDA From Your Terminal</a:t>
             </a:r>
           </a:p>
           <a:p>
             <a:pPr algn="ctr"/>
             <a:r>
-              <a:rPr lang="en-US" dirty="0"/>
+              <a:rPr lang="en-US"/>
               <a:t>By: Brennan Holt and Levi Edmonds</a:t>
             </a:r>
           </a:p>
@@ -3040,13 +3063,13 @@
           <a:lstStyle/>
           <a:p>
             <a:r>
-              <a:rPr lang="en-US" sz="1500" dirty="0"/>
+              <a:rPr lang="en-US" sz="1500"/>
               <a:t>Goal:</a:t>
             </a:r>
           </a:p>
           <a:p>
             <a:r>
-              <a:rPr lang="en-US" sz="1500" dirty="0"/>
+              <a:rPr lang="en-US" sz="1500"/>
               <a:t>Our project builds a terminal user interface (TUI) for exploratory data analysis. The goal is to let the user:</a:t>
             </a:r>
           </a:p>
@@ -3056,7 +3079,7 @@
               <a:buChar char="-"/>
             </a:pPr>
             <a:r>
-              <a:rPr lang="en-US" sz="1500" dirty="0"/>
+              <a:rPr lang="en-US" sz="1500"/>
               <a:t>Load csv and excel datasets</a:t>
             </a:r>
           </a:p>
@@ -3066,7 +3089,7 @@
               <a:buChar char="-"/>
             </a:pPr>
             <a:r>
-              <a:rPr lang="en-US" sz="1500" dirty="0"/>
+              <a:rPr lang="en-US" sz="1500"/>
               <a:t>Inspect file structure and column information</a:t>
             </a:r>
           </a:p>
@@ -3076,7 +3099,7 @@
               <a:buChar char="-"/>
             </a:pPr>
             <a:r>
-              <a:rPr lang="en-US" sz="1500" dirty="0"/>
+              <a:rPr lang="en-US" sz="1500"/>
               <a:t>View basic dataset summaries</a:t>
             </a:r>
           </a:p>
@@ -3086,7 +3109,7 @@
               <a:buChar char="-"/>
             </a:pPr>
             <a:r>
-              <a:rPr lang="en-US" sz="1500" dirty="0"/>
+              <a:rPr lang="en-US" sz="1500"/>
               <a:t>Choose columns for plotting</a:t>
             </a:r>
           </a:p>
@@ -3096,7 +3119,7 @@
               <a:buChar char="-"/>
             </a:pPr>
             <a:r>
-              <a:rPr lang="en-US" sz="1500" dirty="0"/>
+              <a:rPr lang="en-US" sz="1500"/>
               <a:t>Generate simple visualizations in the terminal</a:t>
             </a:r>
           </a:p>
@@ -3125,20 +3148,20 @@
           <a:noFill/>
         </p:spPr>
         <p:txBody>
-          <a:bodyPr wrap="square" rtlCol="0">
+          <a:bodyPr wrap="square" lIns="91440" tIns="45720" rIns="91440" bIns="45720" rtlCol="0" anchor="t">
             <a:spAutoFit/>
           </a:bodyPr>
           <a:lstStyle/>
           <a:p>
             <a:r>
-              <a:rPr lang="en-US" sz="1500" dirty="0"/>
+              <a:rPr lang="en-US" sz="1500"/>
               <a:t>Data:</a:t>
             </a:r>
           </a:p>
           <a:p>
             <a:r>
-              <a:rPr lang="en-US" sz="1500" dirty="0"/>
-              <a:t>Our data is Table of structured data in a .csv or .xlsx format. The files are stored in a data/ folder. We obtained the data from “BLANK.”</a:t>
+              <a:rPr lang="en-US" sz="1500"/>
+              <a:t>Our data is Table of structured data in a .csv or .xlsx format. The files are stored in a data/ folder. We obtained the data from Our World in Data</a:t>
             </a:r>
           </a:p>
         </p:txBody>
@@ -3158,7 +3181,7 @@
         <p:spPr>
           <a:xfrm>
             <a:off x="484632" y="3941064"/>
-            <a:ext cx="3941064" cy="2908489"/>
+            <a:ext cx="3941064" cy="3370153"/>
           </a:xfrm>
           <a:prstGeom prst="rect">
             <a:avLst/>
@@ -3166,70 +3189,76 @@
           <a:noFill/>
         </p:spPr>
         <p:txBody>
-          <a:bodyPr wrap="square" rtlCol="0">
+          <a:bodyPr wrap="square" lIns="91440" tIns="45720" rIns="91440" bIns="45720" rtlCol="0" anchor="t">
             <a:spAutoFit/>
           </a:bodyPr>
           <a:lstStyle/>
           <a:p>
             <a:r>
-              <a:rPr lang="en-US" sz="1500" dirty="0"/>
+              <a:rPr lang="en-US" sz="1500"/>
               <a:t>Workflow:</a:t>
             </a:r>
           </a:p>
           <a:p>
             <a:r>
-              <a:rPr lang="en-US" sz="1500" dirty="0"/>
+              <a:rPr lang="en-US" sz="1500"/>
               <a:t>Select File -&gt; Load/Convert Data -&gt; Parse Columns -&gt; Inspect Stats -&gt; Choose x/y -&gt; Select Plot Type -&gt; Make Plot</a:t>
             </a:r>
           </a:p>
           <a:p>
-            <a:endParaRPr lang="en-US" sz="1500" dirty="0"/>
-          </a:p>
-          <a:p>
-            <a:r>
-              <a:rPr lang="en-US" sz="1500" dirty="0"/>
+            <a:endParaRPr lang="en-US" sz="1500"/>
+          </a:p>
+          <a:p>
+            <a:r>
+              <a:rPr lang="en-US" sz="1500"/>
               <a:t>Useful Code:</a:t>
             </a:r>
           </a:p>
           <a:p>
             <a:r>
-              <a:rPr lang="en-US" sz="1500" dirty="0" err="1"/>
+              <a:rPr lang="en-US" sz="1500" err="1"/>
               <a:t>FilteredDirectoryTree</a:t>
             </a:r>
             <a:r>
-              <a:rPr lang="en-US" sz="1500" dirty="0"/>
+              <a:rPr lang="en-US" sz="1500"/>
               <a:t>: restricts selectable files to csv or excel</a:t>
             </a:r>
           </a:p>
           <a:p>
             <a:r>
-              <a:rPr lang="en-US" sz="1500" dirty="0"/>
+              <a:rPr lang="en-US" sz="1500"/>
               <a:t>Textual: TUI layout and controls</a:t>
             </a:r>
           </a:p>
           <a:p>
             <a:r>
-              <a:rPr lang="en-US" sz="1500" dirty="0" err="1"/>
+              <a:rPr lang="en-US" sz="1500" err="1"/>
               <a:t>Plotext</a:t>
             </a:r>
             <a:r>
-              <a:rPr lang="en-US" sz="1500" dirty="0"/>
+              <a:rPr lang="en-US" sz="1500"/>
               <a:t>/</a:t>
             </a:r>
             <a:r>
-              <a:rPr lang="en-US" sz="1500" dirty="0" err="1"/>
+              <a:rPr lang="en-US" sz="1500" err="1"/>
               <a:t>textual_plotext</a:t>
             </a:r>
             <a:r>
-              <a:rPr lang="en-US" sz="1500" dirty="0"/>
+              <a:rPr lang="en-US" sz="1500"/>
               <a:t>: terminal plotting</a:t>
             </a:r>
           </a:p>
           <a:p>
-            <a:endParaRPr lang="en-US" sz="1500" dirty="0"/>
-          </a:p>
-          <a:p>
-            <a:endParaRPr lang="en-US" dirty="0"/>
+            <a:r>
+              <a:rPr lang="en-US" sz="1500"/>
+              <a:t>Subprocess: Allows use of csvkit commands behind the scenes</a:t>
+            </a:r>
+          </a:p>
+          <a:p>
+            <a:endParaRPr lang="en-US" sz="1500"/>
+          </a:p>
+          <a:p>
+            <a:endParaRPr lang="en-US"/>
           </a:p>
         </p:txBody>
       </p:sp>
@@ -3263,7 +3292,7 @@
           <a:p>
             <a:pPr algn="ctr"/>
             <a:r>
-              <a:rPr lang="en-US" dirty="0"/>
+              <a:rPr lang="en-US"/>
               <a:t>Results:</a:t>
             </a:r>
           </a:p>
@@ -3298,13 +3327,13 @@
           <a:lstStyle/>
           <a:p>
             <a:r>
-              <a:rPr lang="en-US" sz="1500" dirty="0"/>
+              <a:rPr lang="en-US" sz="1500"/>
               <a:t>Reflection:</a:t>
             </a:r>
           </a:p>
           <a:p>
             <a:r>
-              <a:rPr lang="en-US" sz="1500" dirty="0"/>
+              <a:rPr lang="en-US" sz="1500"/>
               <a:t>What worked well:</a:t>
             </a:r>
           </a:p>
@@ -3314,7 +3343,7 @@
               <a:buChar char="-"/>
             </a:pPr>
             <a:r>
-              <a:rPr lang="en-US" sz="1500" dirty="0"/>
+              <a:rPr lang="en-US" sz="1500"/>
               <a:t>Textual allowed for clean, usable interface</a:t>
             </a:r>
           </a:p>
@@ -3324,11 +3353,11 @@
               <a:buChar char="-"/>
             </a:pPr>
             <a:r>
-              <a:rPr lang="en-US" sz="1500" dirty="0" err="1"/>
+              <a:rPr lang="en-US" sz="1500" err="1"/>
               <a:t>DirectoryTree</a:t>
             </a:r>
             <a:r>
-              <a:rPr lang="en-US" sz="1500" dirty="0"/>
+              <a:rPr lang="en-US" sz="1500"/>
               <a:t> allowed for selection of excel or csv files</a:t>
             </a:r>
           </a:p>
@@ -3338,7 +3367,7 @@
               <a:buChar char="-"/>
             </a:pPr>
             <a:r>
-              <a:rPr lang="en-US" sz="1500" dirty="0"/>
+              <a:rPr lang="en-US" sz="1500"/>
               <a:t>File stats and headers improved usability</a:t>
             </a:r>
           </a:p>
@@ -3348,13 +3377,13 @@
               <a:buChar char="-"/>
             </a:pPr>
             <a:r>
-              <a:rPr lang="en-US" sz="1500" dirty="0"/>
+              <a:rPr lang="en-US" sz="1500"/>
               <a:t>Plotting in terminal created a smooth workflow</a:t>
             </a:r>
           </a:p>
           <a:p>
             <a:r>
-              <a:rPr lang="en-US" sz="1500" dirty="0"/>
+              <a:rPr lang="en-US" sz="1500"/>
               <a:t>Challenges:</a:t>
             </a:r>
           </a:p>
@@ -3364,13 +3393,13 @@
               <a:buChar char="-"/>
             </a:pPr>
             <a:r>
-              <a:rPr lang="en-US" sz="1500" dirty="0"/>
+              <a:rPr lang="en-US" sz="1500"/>
               <a:t>Large data sets can freeze the TUI</a:t>
             </a:r>
           </a:p>
           <a:p>
             <a:r>
-              <a:rPr lang="en-US" sz="1500" dirty="0"/>
+              <a:rPr lang="en-US" sz="1500"/>
               <a:t>Improvements:</a:t>
             </a:r>
           </a:p>
@@ -3380,7 +3409,7 @@
               <a:buChar char="-"/>
             </a:pPr>
             <a:r>
-              <a:rPr lang="en-US" sz="1500" dirty="0"/>
+              <a:rPr lang="en-US" sz="1500"/>
               <a:t>make plotting work better with larger datasets</a:t>
             </a:r>
           </a:p>
@@ -3390,7 +3419,7 @@
               <a:buChar char="-"/>
             </a:pPr>
             <a:r>
-              <a:rPr lang="en-US" sz="1500" dirty="0"/>
+              <a:rPr lang="en-US" sz="1500"/>
               <a:t>Allow for more summary stats</a:t>
             </a:r>
           </a:p>
@@ -3400,7 +3429,7 @@
               <a:buChar char="-"/>
             </a:pPr>
             <a:r>
-              <a:rPr lang="en-US" sz="1500" dirty="0"/>
+              <a:rPr lang="en-US" sz="1500"/>
               <a:t>Allow for export of plots</a:t>
             </a:r>
           </a:p>
@@ -3409,7 +3438,7 @@
               <a:buFontTx/>
               <a:buChar char="-"/>
             </a:pPr>
-            <a:endParaRPr lang="en-US" dirty="0"/>
+            <a:endParaRPr lang="en-US"/>
           </a:p>
         </p:txBody>
       </p:sp>

--- a/Presentation.pptx
+++ b/Presentation.pptx
@@ -118,6 +118,86 @@
 <file path=ppt/changesInfos/changesInfo1.xml><?xml version="1.0" encoding="utf-8"?>
 <pc:chgInfo xmlns:a="http://schemas.openxmlformats.org/drawingml/2006/main" xmlns:r="http://schemas.openxmlformats.org/officeDocument/2006/relationships" xmlns:ac="http://schemas.microsoft.com/office/drawing/2013/main/command" xmlns:pc="http://schemas.microsoft.com/office/powerpoint/2013/main/command">
   <pc:docChgLst>
+    <pc:chgData name="Holt, Brennan, E. CDT (EDU)" userId="976121be-3fdb-481b-bd53-af978448beb2" providerId="ADAL" clId="{630E5EF7-4E0E-4B25-899C-BF5C2FFB5156}"/>
+    <pc:docChg chg="custSel modSld">
+      <pc:chgData name="Holt, Brennan, E. CDT (EDU)" userId="976121be-3fdb-481b-bd53-af978448beb2" providerId="ADAL" clId="{630E5EF7-4E0E-4B25-899C-BF5C2FFB5156}" dt="2026-04-29T02:51:03.514" v="16" actId="20577"/>
+      <pc:docMkLst>
+        <pc:docMk/>
+      </pc:docMkLst>
+      <pc:sldChg chg="addSp delSp modSp mod">
+        <pc:chgData name="Holt, Brennan, E. CDT (EDU)" userId="976121be-3fdb-481b-bd53-af978448beb2" providerId="ADAL" clId="{630E5EF7-4E0E-4B25-899C-BF5C2FFB5156}" dt="2026-04-29T02:51:03.514" v="16" actId="20577"/>
+        <pc:sldMkLst>
+          <pc:docMk/>
+          <pc:sldMk cId="2478767959" sldId="256"/>
+        </pc:sldMkLst>
+        <pc:spChg chg="mod">
+          <ac:chgData name="Holt, Brennan, E. CDT (EDU)" userId="976121be-3fdb-481b-bd53-af978448beb2" providerId="ADAL" clId="{630E5EF7-4E0E-4B25-899C-BF5C2FFB5156}" dt="2026-04-29T02:51:03.514" v="16" actId="20577"/>
+          <ac:spMkLst>
+            <pc:docMk/>
+            <pc:sldMk cId="2478767959" sldId="256"/>
+            <ac:spMk id="7" creationId="{0E4BC430-9E0A-0933-82A8-DC431303C8DE}"/>
+          </ac:spMkLst>
+        </pc:spChg>
+        <pc:picChg chg="del">
+          <ac:chgData name="Holt, Brennan, E. CDT (EDU)" userId="976121be-3fdb-481b-bd53-af978448beb2" providerId="ADAL" clId="{630E5EF7-4E0E-4B25-899C-BF5C2FFB5156}" dt="2026-04-29T02:44:10.339" v="11" actId="478"/>
+          <ac:picMkLst>
+            <pc:docMk/>
+            <pc:sldMk cId="2478767959" sldId="256"/>
+            <ac:picMk id="11" creationId="{C6242609-08D3-2AB7-FEE1-232BB9D52C2B}"/>
+          </ac:picMkLst>
+        </pc:picChg>
+        <pc:picChg chg="del">
+          <ac:chgData name="Holt, Brennan, E. CDT (EDU)" userId="976121be-3fdb-481b-bd53-af978448beb2" providerId="ADAL" clId="{630E5EF7-4E0E-4B25-899C-BF5C2FFB5156}" dt="2026-04-29T02:43:03.863" v="2" actId="478"/>
+          <ac:picMkLst>
+            <pc:docMk/>
+            <pc:sldMk cId="2478767959" sldId="256"/>
+            <ac:picMk id="13" creationId="{436B437C-3B03-B310-D4D2-71EC7C8521FF}"/>
+          </ac:picMkLst>
+        </pc:picChg>
+        <pc:picChg chg="del">
+          <ac:chgData name="Holt, Brennan, E. CDT (EDU)" userId="976121be-3fdb-481b-bd53-af978448beb2" providerId="ADAL" clId="{630E5EF7-4E0E-4B25-899C-BF5C2FFB5156}" dt="2026-04-29T02:43:00.819" v="0" actId="478"/>
+          <ac:picMkLst>
+            <pc:docMk/>
+            <pc:sldMk cId="2478767959" sldId="256"/>
+            <ac:picMk id="15" creationId="{9BB1BC5A-8F81-37A9-2FD0-C6B0842A7D27}"/>
+          </ac:picMkLst>
+        </pc:picChg>
+        <pc:picChg chg="del">
+          <ac:chgData name="Holt, Brennan, E. CDT (EDU)" userId="976121be-3fdb-481b-bd53-af978448beb2" providerId="ADAL" clId="{630E5EF7-4E0E-4B25-899C-BF5C2FFB5156}" dt="2026-04-29T02:43:01.707" v="1" actId="478"/>
+          <ac:picMkLst>
+            <pc:docMk/>
+            <pc:sldMk cId="2478767959" sldId="256"/>
+            <ac:picMk id="17" creationId="{CEF3C81E-6E08-074F-4FDB-3CBEA5F33283}"/>
+          </ac:picMkLst>
+        </pc:picChg>
+        <pc:picChg chg="add mod">
+          <ac:chgData name="Holt, Brennan, E. CDT (EDU)" userId="976121be-3fdb-481b-bd53-af978448beb2" providerId="ADAL" clId="{630E5EF7-4E0E-4B25-899C-BF5C2FFB5156}" dt="2026-04-29T02:43:37.199" v="6" actId="1076"/>
+          <ac:picMkLst>
+            <pc:docMk/>
+            <pc:sldMk cId="2478767959" sldId="256"/>
+            <ac:picMk id="19" creationId="{CDE5EFE3-851B-83D4-D281-C42AB8483140}"/>
+          </ac:picMkLst>
+        </pc:picChg>
+        <pc:picChg chg="add mod">
+          <ac:chgData name="Holt, Brennan, E. CDT (EDU)" userId="976121be-3fdb-481b-bd53-af978448beb2" providerId="ADAL" clId="{630E5EF7-4E0E-4B25-899C-BF5C2FFB5156}" dt="2026-04-29T02:44:07.844" v="10" actId="1076"/>
+          <ac:picMkLst>
+            <pc:docMk/>
+            <pc:sldMk cId="2478767959" sldId="256"/>
+            <ac:picMk id="21" creationId="{5B97F6D2-01CD-A93C-6E0A-EABF5B983FE9}"/>
+          </ac:picMkLst>
+        </pc:picChg>
+        <pc:picChg chg="add mod">
+          <ac:chgData name="Holt, Brennan, E. CDT (EDU)" userId="976121be-3fdb-481b-bd53-af978448beb2" providerId="ADAL" clId="{630E5EF7-4E0E-4B25-899C-BF5C2FFB5156}" dt="2026-04-29T02:50:43.463" v="15" actId="14100"/>
+          <ac:picMkLst>
+            <pc:docMk/>
+            <pc:sldMk cId="2478767959" sldId="256"/>
+            <ac:picMk id="23" creationId="{98BF2B3D-D6A7-0B44-C19D-0ABFB297C852}"/>
+          </ac:picMkLst>
+        </pc:picChg>
+      </pc:sldChg>
+    </pc:docChg>
+  </pc:docChgLst>
+  <pc:docChgLst>
     <pc:chgData name="Edmonds, Levi, A. CDT (EDU)" userId="S::levi.a.edmonds@uscga.edu::726a4f9e-a7b6-4cd1-909c-56511f60f9b8" providerId="AD" clId="Web-{D040D512-EB9C-5B4C-A671-CE0141D6DBAD}"/>
     <pc:docChg chg="modSld">
       <pc:chgData name="Edmonds, Levi, A. CDT (EDU)" userId="S::levi.a.edmonds@uscga.edu::726a4f9e-a7b6-4cd1-909c-56511f60f9b8" providerId="AD" clId="Web-{D040D512-EB9C-5B4C-A671-CE0141D6DBAD}" dt="2026-04-29T00:47:27.871" v="61" actId="20577"/>
@@ -197,6 +277,7 @@
               <a:rPr lang="en-US"/>
               <a:t>Click to edit Master title style</a:t>
             </a:r>
+            <a:endParaRPr lang="en-US" dirty="0"/>
           </a:p>
         </p:txBody>
       </p:sp>
@@ -261,6 +342,7 @@
               <a:rPr lang="en-US"/>
               <a:t>Click to edit Master subtitle style</a:t>
             </a:r>
+            <a:endParaRPr lang="en-US" dirty="0"/>
           </a:p>
         </p:txBody>
       </p:sp>
@@ -281,7 +363,7 @@
           <a:p>
             <a:fld id="{60749F31-73BE-46B5-90B6-A52AECA1012A}" type="datetimeFigureOut">
               <a:rPr lang="en-US" smtClean="0"/>
-              <a:t>4/28/2026</a:t>
+              <a:t>4/27/2026</a:t>
             </a:fld>
             <a:endParaRPr lang="en-US"/>
           </a:p>
@@ -378,6 +460,7 @@
               <a:rPr lang="en-US"/>
               <a:t>Click to edit Master title style</a:t>
             </a:r>
+            <a:endParaRPr lang="en-US" dirty="0"/>
           </a:p>
         </p:txBody>
       </p:sp>
@@ -429,6 +512,7 @@
               <a:rPr lang="en-US"/>
               <a:t>Fifth level</a:t>
             </a:r>
+            <a:endParaRPr lang="en-US" dirty="0"/>
           </a:p>
         </p:txBody>
       </p:sp>
@@ -449,7 +533,7 @@
           <a:p>
             <a:fld id="{60749F31-73BE-46B5-90B6-A52AECA1012A}" type="datetimeFigureOut">
               <a:rPr lang="en-US" smtClean="0"/>
-              <a:t>4/28/2026</a:t>
+              <a:t>4/27/2026</a:t>
             </a:fld>
             <a:endParaRPr lang="en-US"/>
           </a:p>
@@ -551,6 +635,7 @@
               <a:rPr lang="en-US"/>
               <a:t>Click to edit Master title style</a:t>
             </a:r>
+            <a:endParaRPr lang="en-US" dirty="0"/>
           </a:p>
         </p:txBody>
       </p:sp>
@@ -607,6 +692,7 @@
               <a:rPr lang="en-US"/>
               <a:t>Fifth level</a:t>
             </a:r>
+            <a:endParaRPr lang="en-US" dirty="0"/>
           </a:p>
         </p:txBody>
       </p:sp>
@@ -627,7 +713,7 @@
           <a:p>
             <a:fld id="{60749F31-73BE-46B5-90B6-A52AECA1012A}" type="datetimeFigureOut">
               <a:rPr lang="en-US" smtClean="0"/>
-              <a:t>4/28/2026</a:t>
+              <a:t>4/27/2026</a:t>
             </a:fld>
             <a:endParaRPr lang="en-US"/>
           </a:p>
@@ -724,6 +810,7 @@
               <a:rPr lang="en-US"/>
               <a:t>Click to edit Master title style</a:t>
             </a:r>
+            <a:endParaRPr lang="en-US" dirty="0"/>
           </a:p>
         </p:txBody>
       </p:sp>
@@ -775,6 +862,7 @@
               <a:rPr lang="en-US"/>
               <a:t>Fifth level</a:t>
             </a:r>
+            <a:endParaRPr lang="en-US" dirty="0"/>
           </a:p>
         </p:txBody>
       </p:sp>
@@ -795,7 +883,7 @@
           <a:p>
             <a:fld id="{60749F31-73BE-46B5-90B6-A52AECA1012A}" type="datetimeFigureOut">
               <a:rPr lang="en-US" smtClean="0"/>
-              <a:t>4/28/2026</a:t>
+              <a:t>4/27/2026</a:t>
             </a:fld>
             <a:endParaRPr lang="en-US"/>
           </a:p>
@@ -901,6 +989,7 @@
               <a:rPr lang="en-US"/>
               <a:t>Click to edit Master title style</a:t>
             </a:r>
+            <a:endParaRPr lang="en-US" dirty="0"/>
           </a:p>
         </p:txBody>
       </p:sp>
@@ -1040,7 +1129,7 @@
           <a:p>
             <a:fld id="{60749F31-73BE-46B5-90B6-A52AECA1012A}" type="datetimeFigureOut">
               <a:rPr lang="en-US" smtClean="0"/>
-              <a:t>4/28/2026</a:t>
+              <a:t>4/27/2026</a:t>
             </a:fld>
             <a:endParaRPr lang="en-US"/>
           </a:p>
@@ -1137,6 +1226,7 @@
               <a:rPr lang="en-US"/>
               <a:t>Click to edit Master title style</a:t>
             </a:r>
+            <a:endParaRPr lang="en-US" dirty="0"/>
           </a:p>
         </p:txBody>
       </p:sp>
@@ -1193,6 +1283,7 @@
               <a:rPr lang="en-US"/>
               <a:t>Fifth level</a:t>
             </a:r>
+            <a:endParaRPr lang="en-US" dirty="0"/>
           </a:p>
         </p:txBody>
       </p:sp>
@@ -1249,6 +1340,7 @@
               <a:rPr lang="en-US"/>
               <a:t>Fifth level</a:t>
             </a:r>
+            <a:endParaRPr lang="en-US" dirty="0"/>
           </a:p>
         </p:txBody>
       </p:sp>
@@ -1269,7 +1361,7 @@
           <a:p>
             <a:fld id="{60749F31-73BE-46B5-90B6-A52AECA1012A}" type="datetimeFigureOut">
               <a:rPr lang="en-US" smtClean="0"/>
-              <a:t>4/28/2026</a:t>
+              <a:t>4/27/2026</a:t>
             </a:fld>
             <a:endParaRPr lang="en-US"/>
           </a:p>
@@ -1371,6 +1463,7 @@
               <a:rPr lang="en-US"/>
               <a:t>Click to edit Master title style</a:t>
             </a:r>
+            <a:endParaRPr lang="en-US" dirty="0"/>
           </a:p>
         </p:txBody>
       </p:sp>
@@ -1492,6 +1585,7 @@
               <a:rPr lang="en-US"/>
               <a:t>Fifth level</a:t>
             </a:r>
+            <a:endParaRPr lang="en-US" dirty="0"/>
           </a:p>
         </p:txBody>
       </p:sp>
@@ -1613,6 +1707,7 @@
               <a:rPr lang="en-US"/>
               <a:t>Fifth level</a:t>
             </a:r>
+            <a:endParaRPr lang="en-US" dirty="0"/>
           </a:p>
         </p:txBody>
       </p:sp>
@@ -1633,7 +1728,7 @@
           <a:p>
             <a:fld id="{60749F31-73BE-46B5-90B6-A52AECA1012A}" type="datetimeFigureOut">
               <a:rPr lang="en-US" smtClean="0"/>
-              <a:t>4/28/2026</a:t>
+              <a:t>4/27/2026</a:t>
             </a:fld>
             <a:endParaRPr lang="en-US"/>
           </a:p>
@@ -1730,6 +1825,7 @@
               <a:rPr lang="en-US"/>
               <a:t>Click to edit Master title style</a:t>
             </a:r>
+            <a:endParaRPr lang="en-US" dirty="0"/>
           </a:p>
         </p:txBody>
       </p:sp>
@@ -1750,7 +1846,7 @@
           <a:p>
             <a:fld id="{60749F31-73BE-46B5-90B6-A52AECA1012A}" type="datetimeFigureOut">
               <a:rPr lang="en-US" smtClean="0"/>
-              <a:t>4/28/2026</a:t>
+              <a:t>4/27/2026</a:t>
             </a:fld>
             <a:endParaRPr lang="en-US"/>
           </a:p>
@@ -1845,7 +1941,7 @@
           <a:p>
             <a:fld id="{60749F31-73BE-46B5-90B6-A52AECA1012A}" type="datetimeFigureOut">
               <a:rPr lang="en-US" smtClean="0"/>
-              <a:t>4/28/2026</a:t>
+              <a:t>4/27/2026</a:t>
             </a:fld>
             <a:endParaRPr lang="en-US"/>
           </a:p>
@@ -1951,6 +2047,7 @@
               <a:rPr lang="en-US"/>
               <a:t>Click to edit Master title style</a:t>
             </a:r>
+            <a:endParaRPr lang="en-US" dirty="0"/>
           </a:p>
         </p:txBody>
       </p:sp>
@@ -2035,6 +2132,7 @@
               <a:rPr lang="en-US"/>
               <a:t>Fifth level</a:t>
             </a:r>
+            <a:endParaRPr lang="en-US" dirty="0"/>
           </a:p>
         </p:txBody>
       </p:sp>
@@ -2120,7 +2218,7 @@
           <a:p>
             <a:fld id="{60749F31-73BE-46B5-90B6-A52AECA1012A}" type="datetimeFigureOut">
               <a:rPr lang="en-US" smtClean="0"/>
-              <a:t>4/28/2026</a:t>
+              <a:t>4/27/2026</a:t>
             </a:fld>
             <a:endParaRPr lang="en-US"/>
           </a:p>
@@ -2226,6 +2324,7 @@
               <a:rPr lang="en-US"/>
               <a:t>Click to edit Master title style</a:t>
             </a:r>
+            <a:endParaRPr lang="en-US" dirty="0"/>
           </a:p>
         </p:txBody>
       </p:sp>
@@ -2290,6 +2389,7 @@
               <a:rPr lang="en-US"/>
               <a:t>Click icon to add picture</a:t>
             </a:r>
+            <a:endParaRPr lang="en-US" dirty="0"/>
           </a:p>
         </p:txBody>
       </p:sp>
@@ -2375,7 +2475,7 @@
           <a:p>
             <a:fld id="{60749F31-73BE-46B5-90B6-A52AECA1012A}" type="datetimeFigureOut">
               <a:rPr lang="en-US" smtClean="0"/>
-              <a:t>4/28/2026</a:t>
+              <a:t>4/27/2026</a:t>
             </a:fld>
             <a:endParaRPr lang="en-US"/>
           </a:p>
@@ -2487,6 +2587,7 @@
               <a:rPr lang="en-US"/>
               <a:t>Click to edit Master title style</a:t>
             </a:r>
+            <a:endParaRPr lang="en-US" dirty="0"/>
           </a:p>
         </p:txBody>
       </p:sp>
@@ -2548,6 +2649,7 @@
               <a:rPr lang="en-US"/>
               <a:t>Fifth level</a:t>
             </a:r>
+            <a:endParaRPr lang="en-US" dirty="0"/>
           </a:p>
         </p:txBody>
       </p:sp>
@@ -2586,7 +2688,7 @@
           <a:p>
             <a:fld id="{60749F31-73BE-46B5-90B6-A52AECA1012A}" type="datetimeFigureOut">
               <a:rPr lang="en-US" smtClean="0"/>
-              <a:t>4/28/2026</a:t>
+              <a:t>4/27/2026</a:t>
             </a:fld>
             <a:endParaRPr lang="en-US"/>
           </a:p>
@@ -3021,14 +3123,14 @@
           <a:p>
             <a:pPr algn="ctr"/>
             <a:r>
-              <a:rPr lang="en-US"/>
+              <a:rPr lang="en-US" dirty="0"/>
               <a:t>EDA From Your Terminal</a:t>
             </a:r>
           </a:p>
           <a:p>
             <a:pPr algn="ctr"/>
             <a:r>
-              <a:rPr lang="en-US"/>
+              <a:rPr lang="en-US" dirty="0"/>
               <a:t>By: Brennan Holt and Levi Edmonds</a:t>
             </a:r>
           </a:p>
@@ -3063,13 +3165,13 @@
           <a:lstStyle/>
           <a:p>
             <a:r>
-              <a:rPr lang="en-US" sz="1500"/>
+              <a:rPr lang="en-US" sz="1500" dirty="0"/>
               <a:t>Goal:</a:t>
             </a:r>
           </a:p>
           <a:p>
             <a:r>
-              <a:rPr lang="en-US" sz="1500"/>
+              <a:rPr lang="en-US" sz="1500" dirty="0"/>
               <a:t>Our project builds a terminal user interface (TUI) for exploratory data analysis. The goal is to let the user:</a:t>
             </a:r>
           </a:p>
@@ -3079,7 +3181,7 @@
               <a:buChar char="-"/>
             </a:pPr>
             <a:r>
-              <a:rPr lang="en-US" sz="1500"/>
+              <a:rPr lang="en-US" sz="1500" dirty="0"/>
               <a:t>Load csv and excel datasets</a:t>
             </a:r>
           </a:p>
@@ -3089,7 +3191,7 @@
               <a:buChar char="-"/>
             </a:pPr>
             <a:r>
-              <a:rPr lang="en-US" sz="1500"/>
+              <a:rPr lang="en-US" sz="1500" dirty="0"/>
               <a:t>Inspect file structure and column information</a:t>
             </a:r>
           </a:p>
@@ -3099,7 +3201,7 @@
               <a:buChar char="-"/>
             </a:pPr>
             <a:r>
-              <a:rPr lang="en-US" sz="1500"/>
+              <a:rPr lang="en-US" sz="1500" dirty="0"/>
               <a:t>View basic dataset summaries</a:t>
             </a:r>
           </a:p>
@@ -3109,7 +3211,7 @@
               <a:buChar char="-"/>
             </a:pPr>
             <a:r>
-              <a:rPr lang="en-US" sz="1500"/>
+              <a:rPr lang="en-US" sz="1500" dirty="0"/>
               <a:t>Choose columns for plotting</a:t>
             </a:r>
           </a:p>
@@ -3119,7 +3221,7 @@
               <a:buChar char="-"/>
             </a:pPr>
             <a:r>
-              <a:rPr lang="en-US" sz="1500"/>
+              <a:rPr lang="en-US" sz="1500" dirty="0"/>
               <a:t>Generate simple visualizations in the terminal</a:t>
             </a:r>
           </a:p>
@@ -3154,15 +3256,20 @@
           <a:lstStyle/>
           <a:p>
             <a:r>
+              <a:rPr lang="en-US" sz="1500" dirty="0"/>
+              <a:t>Data:</a:t>
+            </a:r>
+          </a:p>
+          <a:p>
+            <a:r>
+              <a:rPr lang="en-US" sz="1500" dirty="0"/>
+              <a:t>Our data is Table of structured data in a .csv or .xlsx format. The files are stored in a data/ folder. We obtained the data from </a:t>
+            </a:r>
+            <a:r>
               <a:rPr lang="en-US" sz="1500"/>
-              <a:t>Data:</a:t>
-            </a:r>
-          </a:p>
-          <a:p>
-            <a:r>
-              <a:rPr lang="en-US" sz="1500"/>
-              <a:t>Our data is Table of structured data in a .csv or .xlsx format. The files are stored in a data/ folder. We obtained the data from Our World in Data</a:t>
-            </a:r>
+              <a:t>Our World in Data</a:t>
+            </a:r>
+            <a:endParaRPr lang="en-US" sz="1500" dirty="0"/>
           </a:p>
         </p:txBody>
       </p:sp>
@@ -3181,7 +3288,7 @@
         <p:spPr>
           <a:xfrm>
             <a:off x="484632" y="3941064"/>
-            <a:ext cx="3941064" cy="3370153"/>
+            <a:ext cx="3941064" cy="2908489"/>
           </a:xfrm>
           <a:prstGeom prst="rect">
             <a:avLst/>
@@ -3195,70 +3302,64 @@
           <a:lstStyle/>
           <a:p>
             <a:r>
-              <a:rPr lang="en-US" sz="1500"/>
+              <a:rPr lang="en-US" sz="1500" dirty="0"/>
               <a:t>Workflow:</a:t>
             </a:r>
           </a:p>
           <a:p>
             <a:r>
-              <a:rPr lang="en-US" sz="1500"/>
+              <a:rPr lang="en-US" sz="1500" dirty="0"/>
               <a:t>Select File -&gt; Load/Convert Data -&gt; Parse Columns -&gt; Inspect Stats -&gt; Choose x/y -&gt; Select Plot Type -&gt; Make Plot</a:t>
             </a:r>
           </a:p>
           <a:p>
-            <a:endParaRPr lang="en-US" sz="1500"/>
-          </a:p>
-          <a:p>
-            <a:r>
-              <a:rPr lang="en-US" sz="1500"/>
+            <a:endParaRPr lang="en-US" sz="1500" dirty="0"/>
+          </a:p>
+          <a:p>
+            <a:r>
+              <a:rPr lang="en-US" sz="1500" dirty="0"/>
               <a:t>Useful Code:</a:t>
             </a:r>
           </a:p>
           <a:p>
             <a:r>
-              <a:rPr lang="en-US" sz="1500" err="1"/>
+              <a:rPr lang="en-US" sz="1500" dirty="0" err="1"/>
               <a:t>FilteredDirectoryTree</a:t>
             </a:r>
             <a:r>
-              <a:rPr lang="en-US" sz="1500"/>
+              <a:rPr lang="en-US" sz="1500" dirty="0"/>
               <a:t>: restricts selectable files to csv or excel</a:t>
             </a:r>
           </a:p>
           <a:p>
             <a:r>
-              <a:rPr lang="en-US" sz="1500"/>
+              <a:rPr lang="en-US" sz="1500" dirty="0"/>
               <a:t>Textual: TUI layout and controls</a:t>
             </a:r>
           </a:p>
           <a:p>
             <a:r>
-              <a:rPr lang="en-US" sz="1500" err="1"/>
+              <a:rPr lang="en-US" sz="1500" dirty="0" err="1"/>
               <a:t>Plotext</a:t>
             </a:r>
             <a:r>
-              <a:rPr lang="en-US" sz="1500"/>
+              <a:rPr lang="en-US" sz="1500" dirty="0"/>
               <a:t>/</a:t>
             </a:r>
             <a:r>
-              <a:rPr lang="en-US" sz="1500" err="1"/>
+              <a:rPr lang="en-US" sz="1500" dirty="0" err="1"/>
               <a:t>textual_plotext</a:t>
             </a:r>
             <a:r>
-              <a:rPr lang="en-US" sz="1500"/>
+              <a:rPr lang="en-US" sz="1500" dirty="0"/>
               <a:t>: terminal plotting</a:t>
             </a:r>
           </a:p>
           <a:p>
-            <a:r>
-              <a:rPr lang="en-US" sz="1500"/>
-              <a:t>Subprocess: Allows use of csvkit commands behind the scenes</a:t>
-            </a:r>
-          </a:p>
-          <a:p>
-            <a:endParaRPr lang="en-US" sz="1500"/>
-          </a:p>
-          <a:p>
-            <a:endParaRPr lang="en-US"/>
+            <a:endParaRPr lang="en-US" sz="1500" dirty="0"/>
+          </a:p>
+          <a:p>
+            <a:endParaRPr lang="en-US" dirty="0"/>
           </a:p>
         </p:txBody>
       </p:sp>
@@ -3292,7 +3393,7 @@
           <a:p>
             <a:pPr algn="ctr"/>
             <a:r>
-              <a:rPr lang="en-US"/>
+              <a:rPr lang="en-US" dirty="0"/>
               <a:t>Results:</a:t>
             </a:r>
           </a:p>
@@ -3327,13 +3428,13 @@
           <a:lstStyle/>
           <a:p>
             <a:r>
-              <a:rPr lang="en-US" sz="1500"/>
+              <a:rPr lang="en-US" sz="1500" dirty="0"/>
               <a:t>Reflection:</a:t>
             </a:r>
           </a:p>
           <a:p>
             <a:r>
-              <a:rPr lang="en-US" sz="1500"/>
+              <a:rPr lang="en-US" sz="1500" dirty="0"/>
               <a:t>What worked well:</a:t>
             </a:r>
           </a:p>
@@ -3343,7 +3444,7 @@
               <a:buChar char="-"/>
             </a:pPr>
             <a:r>
-              <a:rPr lang="en-US" sz="1500"/>
+              <a:rPr lang="en-US" sz="1500" dirty="0"/>
               <a:t>Textual allowed for clean, usable interface</a:t>
             </a:r>
           </a:p>
@@ -3353,11 +3454,11 @@
               <a:buChar char="-"/>
             </a:pPr>
             <a:r>
-              <a:rPr lang="en-US" sz="1500" err="1"/>
+              <a:rPr lang="en-US" sz="1500" dirty="0" err="1"/>
               <a:t>DirectoryTree</a:t>
             </a:r>
             <a:r>
-              <a:rPr lang="en-US" sz="1500"/>
+              <a:rPr lang="en-US" sz="1500" dirty="0"/>
               <a:t> allowed for selection of excel or csv files</a:t>
             </a:r>
           </a:p>
@@ -3367,7 +3468,7 @@
               <a:buChar char="-"/>
             </a:pPr>
             <a:r>
-              <a:rPr lang="en-US" sz="1500"/>
+              <a:rPr lang="en-US" sz="1500" dirty="0"/>
               <a:t>File stats and headers improved usability</a:t>
             </a:r>
           </a:p>
@@ -3377,13 +3478,13 @@
               <a:buChar char="-"/>
             </a:pPr>
             <a:r>
-              <a:rPr lang="en-US" sz="1500"/>
+              <a:rPr lang="en-US" sz="1500" dirty="0"/>
               <a:t>Plotting in terminal created a smooth workflow</a:t>
             </a:r>
           </a:p>
           <a:p>
             <a:r>
-              <a:rPr lang="en-US" sz="1500"/>
+              <a:rPr lang="en-US" sz="1500" dirty="0"/>
               <a:t>Challenges:</a:t>
             </a:r>
           </a:p>
@@ -3393,13 +3494,13 @@
               <a:buChar char="-"/>
             </a:pPr>
             <a:r>
-              <a:rPr lang="en-US" sz="1500"/>
+              <a:rPr lang="en-US" sz="1500" dirty="0"/>
               <a:t>Large data sets can freeze the TUI</a:t>
             </a:r>
           </a:p>
           <a:p>
             <a:r>
-              <a:rPr lang="en-US" sz="1500"/>
+              <a:rPr lang="en-US" sz="1500" dirty="0"/>
               <a:t>Improvements:</a:t>
             </a:r>
           </a:p>
@@ -3409,7 +3510,7 @@
               <a:buChar char="-"/>
             </a:pPr>
             <a:r>
-              <a:rPr lang="en-US" sz="1500"/>
+              <a:rPr lang="en-US" sz="1500" dirty="0"/>
               <a:t>make plotting work better with larger datasets</a:t>
             </a:r>
           </a:p>
@@ -3419,7 +3520,7 @@
               <a:buChar char="-"/>
             </a:pPr>
             <a:r>
-              <a:rPr lang="en-US" sz="1500"/>
+              <a:rPr lang="en-US" sz="1500" dirty="0"/>
               <a:t>Allow for more summary stats</a:t>
             </a:r>
           </a:p>
@@ -3429,7 +3530,7 @@
               <a:buChar char="-"/>
             </a:pPr>
             <a:r>
-              <a:rPr lang="en-US" sz="1500"/>
+              <a:rPr lang="en-US" sz="1500" dirty="0"/>
               <a:t>Allow for export of plots</a:t>
             </a:r>
           </a:p>
@@ -3438,16 +3539,16 @@
               <a:buFontTx/>
               <a:buChar char="-"/>
             </a:pPr>
-            <a:endParaRPr lang="en-US"/>
+            <a:endParaRPr lang="en-US" dirty="0"/>
           </a:p>
         </p:txBody>
       </p:sp>
       <p:pic>
         <p:nvPicPr>
-          <p:cNvPr id="11" name="Picture 10">
+          <p:cNvPr id="19" name="Picture 18">
             <a:extLst>
               <a:ext uri="{FF2B5EF4-FFF2-40B4-BE49-F238E27FC236}">
-                <a16:creationId xmlns:a16="http://schemas.microsoft.com/office/drawing/2014/main" id="{C6242609-08D3-2AB7-FEE1-232BB9D52C2B}"/>
+                <a16:creationId xmlns:a16="http://schemas.microsoft.com/office/drawing/2014/main" id="{CDE5EFE3-851B-83D4-D281-C42AB8483140}"/>
               </a:ext>
             </a:extLst>
           </p:cNvPr>
@@ -3464,8 +3565,8 @@
         </p:blipFill>
         <p:spPr>
           <a:xfrm>
-            <a:off x="4345064" y="2296961"/>
-            <a:ext cx="4155634" cy="2463378"/>
+            <a:off x="4322983" y="4730925"/>
+            <a:ext cx="4155634" cy="642008"/>
           </a:xfrm>
           <a:prstGeom prst="rect">
             <a:avLst/>
@@ -3474,10 +3575,10 @@
       </p:pic>
       <p:pic>
         <p:nvPicPr>
-          <p:cNvPr id="13" name="Picture 12">
+          <p:cNvPr id="21" name="Picture 20">
             <a:extLst>
               <a:ext uri="{FF2B5EF4-FFF2-40B4-BE49-F238E27FC236}">
-                <a16:creationId xmlns:a16="http://schemas.microsoft.com/office/drawing/2014/main" id="{436B437C-3B03-B310-D4D2-71EC7C8521FF}"/>
+                <a16:creationId xmlns:a16="http://schemas.microsoft.com/office/drawing/2014/main" id="{5B97F6D2-01CD-A93C-6E0A-EABF5B983FE9}"/>
               </a:ext>
             </a:extLst>
           </p:cNvPr>
@@ -3494,8 +3595,8 @@
         </p:blipFill>
         <p:spPr>
           <a:xfrm>
-            <a:off x="4345063" y="4609766"/>
-            <a:ext cx="4155635" cy="646331"/>
+            <a:off x="4322983" y="5385431"/>
+            <a:ext cx="4133553" cy="688100"/>
           </a:xfrm>
           <a:prstGeom prst="rect">
             <a:avLst/>
@@ -3504,10 +3605,10 @@
       </p:pic>
       <p:pic>
         <p:nvPicPr>
-          <p:cNvPr id="15" name="Picture 14">
+          <p:cNvPr id="23" name="Picture 22">
             <a:extLst>
               <a:ext uri="{FF2B5EF4-FFF2-40B4-BE49-F238E27FC236}">
-                <a16:creationId xmlns:a16="http://schemas.microsoft.com/office/drawing/2014/main" id="{9BB1BC5A-8F81-37A9-2FD0-C6B0842A7D27}"/>
+                <a16:creationId xmlns:a16="http://schemas.microsoft.com/office/drawing/2014/main" id="{98BF2B3D-D6A7-0B44-C19D-0ABFB297C852}"/>
               </a:ext>
             </a:extLst>
           </p:cNvPr>
@@ -3524,38 +3625,8 @@
         </p:blipFill>
         <p:spPr>
           <a:xfrm>
-            <a:off x="4322981" y="5828770"/>
-            <a:ext cx="4155635" cy="635460"/>
-          </a:xfrm>
-          <a:prstGeom prst="rect">
-            <a:avLst/>
-          </a:prstGeom>
-        </p:spPr>
-      </p:pic>
-      <p:pic>
-        <p:nvPicPr>
-          <p:cNvPr id="17" name="Picture 16">
-            <a:extLst>
-              <a:ext uri="{FF2B5EF4-FFF2-40B4-BE49-F238E27FC236}">
-                <a16:creationId xmlns:a16="http://schemas.microsoft.com/office/drawing/2014/main" id="{CEF3C81E-6E08-074F-4FDB-3CBEA5F33283}"/>
-              </a:ext>
-            </a:extLst>
-          </p:cNvPr>
-          <p:cNvPicPr>
-            <a:picLocks noChangeAspect="1"/>
-          </p:cNvPicPr>
-          <p:nvPr/>
-        </p:nvPicPr>
-        <p:blipFill>
-          <a:blip r:embed="rId5"/>
-          <a:stretch>
-            <a:fillRect/>
-          </a:stretch>
-        </p:blipFill>
-        <p:spPr>
-          <a:xfrm>
-            <a:off x="4322982" y="5243730"/>
-            <a:ext cx="4155635" cy="621061"/>
+            <a:off x="4322983" y="2203401"/>
+            <a:ext cx="4133553" cy="2515026"/>
           </a:xfrm>
           <a:prstGeom prst="rect">
             <a:avLst/>
